--- a/outputs/Smart-Parking-System-Final-Presentation.pptx
+++ b/outputs/Smart-Parking-System-Final-Presentation.pptx
@@ -3233,7 +3233,7 @@
                 </a:solidFill>
                 <a:latin typeface="Times New Roman"/>
               </a:rPr>
-              <a:t>Bakhtiyor Ganijon  ·  Sadriddinov Otabek  ·  Sattor Mamatov  ·  Mirzayev Komronkhon</a:t>
+              <a:t>Bakhtiyor Ganijon  ·  Sadriddinov Otabek  ·  Sattor Mamatov  ·  Mirzaev Komronkhon</a:t>
             </a:r>
           </a:p>
           <a:p>
